--- a/decks/hist-british-empire-india/hist-british-empire-india_ch6_assessment.pptx
+++ b/decks/hist-british-empire-india/hist-british-empire-india_ch6_assessment.pptx
@@ -130,12 +130,12 @@
   <p:extLst>
     <p:ext uri="{521415D9-36F7-43E2-AB2F-B90AF26B5E84}">
       <p14:sectionLst xmlns:p14="http://schemas.microsoft.com/office/powerpoint/2010/main">
-        <p14:section name="Opening" id="{6cd5f1f9-4bfa-da73-62ff-c4cad743eafa}">
+        <p14:section name="Opening" id="{90cf7b3d-a8c4-2a98-fdf8-c5289bf518e0}">
           <p14:sldIdLst>
             <p14:sldId id="256"/>
           </p14:sldIdLst>
         </p14:section>
-        <p14:section name="Gate" id="{a402fc08-83a3-a6eb-131a-eb66dbaccce5}">
+        <p14:section name="Gate" id="{5d96bc08-6b48-03f8-3ba4-dca17d0cabdc}">
           <p14:sldIdLst>
             <p14:sldId id="257"/>
             <p14:sldId id="258"/>
@@ -143,18 +143,18 @@
             <p14:sldId id="260"/>
           </p14:sldIdLst>
         </p14:section>
-        <p14:section name="Pre-teach" id="{87a36fe0-1186-e4ff-1447-574a03d61447}">
+        <p14:section name="Pre-teach" id="{e09fd9be-473d-3ca5-a373-4a9f1a59344c}">
           <p14:sldIdLst>
             <p14:sldId id="261"/>
           </p14:sldIdLst>
         </p14:section>
-        <p14:section name="Read-along" id="{b19faa36-7b9b-b789-7f75-4fc386268d93}">
+        <p14:section name="Read-along" id="{ddb257ff-21d4-342a-18e8-5a2f4d8cea3c}">
           <p14:sldIdLst>
             <p14:sldId id="262"/>
             <p14:sldId id="263"/>
           </p14:sldIdLst>
         </p14:section>
-        <p14:section name="Teach" id="{78cd2069-c5e0-6235-1776-fd2ac424718c}">
+        <p14:section name="Teach" id="{da8a0412-e0c8-ff57-af8e-889642181a1b}">
           <p14:sldIdLst>
             <p14:sldId id="264"/>
             <p14:sldId id="265"/>
@@ -166,7 +166,7 @@
             <p14:sldId id="271"/>
           </p14:sldIdLst>
         </p14:section>
-        <p14:section name="Routes" id="{ca01885e-cd8f-eaa9-c39c-c5f584744724}">
+        <p14:section name="Routes" id="{e7898c9a-3f41-c11f-f053-f51d2112a094}">
           <p14:sldIdLst>
             <p14:sldId id="272"/>
             <p14:sldId id="273"/>
@@ -174,12 +174,12 @@
             <p14:sldId id="275"/>
           </p14:sldIdLst>
         </p14:section>
-        <p14:section name="Close" id="{b74cb76e-085d-6652-84c6-83f5a8a02486}">
+        <p14:section name="Close" id="{5db8b480-ce74-8698-addd-a944348e3212}">
           <p14:sldIdLst>
             <p14:sldId id="276"/>
           </p14:sldIdLst>
         </p14:section>
-        <p14:section name="Answers" id="{950a64a8-e1da-5f86-e6fa-246e5d6dee76}">
+        <p14:section name="Answers" id="{9b688308-7175-8e0b-e591-b260f101886c}">
           <p14:sldIdLst>
             <p14:sldId id="277"/>
             <p14:sldId id="278"/>
